--- a/Apresentação/Aula_Teste_Front_End_UNIFATEA_Final.pptx
+++ b/Apresentação/Aula_Teste_Front_End_UNIFATEA_Final.pptx
@@ -5,7 +5,7 @@
     <p:sldMasterId id="2147483648" r:id="rId1"/>
   </p:sldMasterIdLst>
   <p:notesMasterIdLst>
-    <p:notesMasterId r:id="rId13"/>
+    <p:notesMasterId r:id="rId14"/>
   </p:notesMasterIdLst>
   <p:sldIdLst>
     <p:sldId id="256" r:id="rId2"/>
@@ -19,6 +19,7 @@
     <p:sldId id="266" r:id="rId10"/>
     <p:sldId id="267" r:id="rId11"/>
     <p:sldId id="268" r:id="rId12"/>
+    <p:sldId id="272" r:id="rId13"/>
   </p:sldIdLst>
   <p:sldSz cx="12192000" cy="6858000"/>
   <p:notesSz cx="6858000" cy="9144000"/>
@@ -558,6 +559,101 @@
 </p:notes>
 </file>
 
+<file path=ppt/notesSlides/notesSlide12.xml><?xml version="1.0" encoding="utf-8"?>
+<p:notes xmlns:a="http://schemas.openxmlformats.org/drawingml/2006/main" xmlns:r="http://schemas.openxmlformats.org/officeDocument/2006/relationships" xmlns:p="http://schemas.openxmlformats.org/presentationml/2006/main">
+  <p:cSld>
+    <p:spTree>
+      <p:nvGrpSpPr>
+        <p:cNvPr id="1" name=""/>
+        <p:cNvGrpSpPr/>
+        <p:nvPr/>
+      </p:nvGrpSpPr>
+      <p:grpSpPr>
+        <a:xfrm>
+          <a:off x="0" y="0"/>
+          <a:ext cx="0" cy="0"/>
+          <a:chOff x="0" y="0"/>
+          <a:chExt cx="0" cy="0"/>
+        </a:xfrm>
+      </p:grpSpPr>
+      <p:sp>
+        <p:nvSpPr>
+          <p:cNvPr id="2" name="Slide Image Placeholder 1"/>
+          <p:cNvSpPr>
+            <a:spLocks noGrp="1" noRot="1" noChangeAspect="1"/>
+          </p:cNvSpPr>
+          <p:nvPr>
+            <p:ph type="sldImg"/>
+          </p:nvPr>
+        </p:nvSpPr>
+        <p:spPr/>
+      </p:sp>
+      <p:sp>
+        <p:nvSpPr>
+          <p:cNvPr id="3" name="Notes Placeholder 2"/>
+          <p:cNvSpPr>
+            <a:spLocks noGrp="1"/>
+          </p:cNvSpPr>
+          <p:nvPr>
+            <p:ph type="body" idx="1"/>
+          </p:nvPr>
+        </p:nvSpPr>
+        <p:spPr/>
+        <p:txBody>
+          <a:bodyPr/>
+          <a:lstStyle/>
+          <a:p>
+            <a:r>
+              <a:t>Tempo: 13:00 a 14:30. Propor as três situações e pedir uma resposta breve. As respostas estão nas notas, para não antecipar a avaliação. 1. Alterar o texto inicial do título: HTML, neste exemplo. 2. Mudar a cor do botão: CSS. 3. Exibir outra mensagem após um clique: JavaScript. Explicar que JavaScript também pode mudar texto e estilo em execução; aqui classificamos a responsabilidade principal no exemplo. Síntese final: a marcação organiza, a folha de estilos apresenta e o script programa a interação. Encerrar até 14:30, deixando 30 segundos para transições. Referências de apoio: documentação MDN, consultada em 20/10/2026.</a:t>
+            </a:r>
+          </a:p>
+          <a:p>
+            <a:endParaRPr/>
+          </a:p>
+          <a:p>
+            <a:r>
+              <a:t>Referências: https://developer.mozilla.org/pt-BR/docs/Web/HTML</a:t>
+            </a:r>
+          </a:p>
+          <a:p>
+            <a:r>
+              <a:t>https://developer.mozilla.org/pt-BR/docs/Web/CSS</a:t>
+            </a:r>
+          </a:p>
+          <a:p>
+            <a:r>
+              <a:t>https://developer.mozilla.org/pt-BR/docs/Web/JavaScript</a:t>
+            </a:r>
+          </a:p>
+        </p:txBody>
+      </p:sp>
+      <p:sp>
+        <p:nvSpPr>
+          <p:cNvPr id="4" name="Slide Number Placeholder 3"/>
+          <p:cNvSpPr>
+            <a:spLocks noGrp="1"/>
+          </p:cNvSpPr>
+          <p:nvPr>
+            <p:ph type="sldNum" idx="5"/>
+          </p:nvPr>
+        </p:nvSpPr>
+        <p:spPr/>
+        <p:txBody>
+          <a:bodyPr/>
+          <a:lstStyle/>
+          <a:p>
+            <a:endParaRPr/>
+          </a:p>
+        </p:txBody>
+      </p:sp>
+    </p:spTree>
+  </p:cSld>
+  <p:clrMapOvr>
+    <a:masterClrMapping/>
+  </p:clrMapOvr>
+</p:notes>
+</file>
+
 <file path=ppt/notesSlides/notesSlide2.xml><?xml version="1.0" encoding="utf-8"?>
 <p:notes xmlns:a="http://schemas.openxmlformats.org/drawingml/2006/main" xmlns:r="http://schemas.openxmlformats.org/officeDocument/2006/relationships" xmlns:p="http://schemas.openxmlformats.org/presentationml/2006/main">
   <p:cSld>
@@ -1285,7 +1381,7 @@
           <p:cNvPr id="3" name="Title">
             <a:extLst>
               <a:ext uri="{FF2B5EF4-FFF2-40B4-BE49-F238E27FC236}">
-                <a16:creationId xmlns="" xmlns:a16="http://schemas.microsoft.com/office/drawing/2014/main" id="{F4900870-A8EE-42D6-B176-044DAF885F56}"/>
+                <a16:creationId xmlns:a16="http://schemas.microsoft.com/office/drawing/2014/main" xmlns="" id="{F4900870-A8EE-42D6-B176-044DAF885F56}"/>
               </a:ext>
             </a:extLst>
           </p:cNvPr>
@@ -1516,7 +1612,7 @@
           <p:cNvPr id="2" name="Subtitle">
             <a:extLst>
               <a:ext uri="{FF2B5EF4-FFF2-40B4-BE49-F238E27FC236}">
-                <a16:creationId xmlns="" xmlns:a16="http://schemas.microsoft.com/office/drawing/2014/main" id="{C126B172-D7C3-44CC-AB3A-E48E2997FC94}"/>
+                <a16:creationId xmlns:a16="http://schemas.microsoft.com/office/drawing/2014/main" xmlns="" id="{C126B172-D7C3-44CC-AB3A-E48E2997FC94}"/>
               </a:ext>
             </a:extLst>
           </p:cNvPr>
@@ -1772,7 +1868,7 @@
           <p:cNvPr id="2" name="Section title">
             <a:extLst>
               <a:ext uri="{FF2B5EF4-FFF2-40B4-BE49-F238E27FC236}">
-                <a16:creationId xmlns="" xmlns:a16="http://schemas.microsoft.com/office/drawing/2014/main" id="{83934CFD-B200-4694-9F74-FD6AE4BD4C88}"/>
+                <a16:creationId xmlns:a16="http://schemas.microsoft.com/office/drawing/2014/main" xmlns="" id="{83934CFD-B200-4694-9F74-FD6AE4BD4C88}"/>
               </a:ext>
             </a:extLst>
           </p:cNvPr>
@@ -2028,7 +2124,7 @@
           <p:cNvPr id="3" name="Title">
             <a:extLst>
               <a:ext uri="{FF2B5EF4-FFF2-40B4-BE49-F238E27FC236}">
-                <a16:creationId xmlns="" xmlns:a16="http://schemas.microsoft.com/office/drawing/2014/main" id="{853B72C4-2C8D-4F55-B8A3-CA6679047C34}"/>
+                <a16:creationId xmlns:a16="http://schemas.microsoft.com/office/drawing/2014/main" xmlns="" id="{853B72C4-2C8D-4F55-B8A3-CA6679047C34}"/>
               </a:ext>
             </a:extLst>
           </p:cNvPr>
@@ -2259,7 +2355,7 @@
           <p:cNvPr id="2" name="Body">
             <a:extLst>
               <a:ext uri="{FF2B5EF4-FFF2-40B4-BE49-F238E27FC236}">
-                <a16:creationId xmlns="" xmlns:a16="http://schemas.microsoft.com/office/drawing/2014/main" id="{D6C80DFF-6F9F-4545-AC98-0992174F94E5}"/>
+                <a16:creationId xmlns:a16="http://schemas.microsoft.com/office/drawing/2014/main" xmlns="" id="{D6C80DFF-6F9F-4545-AC98-0992174F94E5}"/>
               </a:ext>
             </a:extLst>
           </p:cNvPr>
@@ -2515,7 +2611,7 @@
           <p:cNvPr id="4" name="Title">
             <a:extLst>
               <a:ext uri="{FF2B5EF4-FFF2-40B4-BE49-F238E27FC236}">
-                <a16:creationId xmlns="" xmlns:a16="http://schemas.microsoft.com/office/drawing/2014/main" id="{C0A1E4FE-64A4-4CD8-956E-6492B38B96D0}"/>
+                <a16:creationId xmlns:a16="http://schemas.microsoft.com/office/drawing/2014/main" xmlns="" id="{C0A1E4FE-64A4-4CD8-956E-6492B38B96D0}"/>
               </a:ext>
             </a:extLst>
           </p:cNvPr>
@@ -2746,7 +2842,7 @@
           <p:cNvPr id="2" name="Left column">
             <a:extLst>
               <a:ext uri="{FF2B5EF4-FFF2-40B4-BE49-F238E27FC236}">
-                <a16:creationId xmlns="" xmlns:a16="http://schemas.microsoft.com/office/drawing/2014/main" id="{4C26436E-C0EE-42D2-B73A-150FDFB81262}"/>
+                <a16:creationId xmlns:a16="http://schemas.microsoft.com/office/drawing/2014/main" xmlns="" id="{4C26436E-C0EE-42D2-B73A-150FDFB81262}"/>
               </a:ext>
             </a:extLst>
           </p:cNvPr>
@@ -2977,7 +3073,7 @@
           <p:cNvPr id="3" name="Right column">
             <a:extLst>
               <a:ext uri="{FF2B5EF4-FFF2-40B4-BE49-F238E27FC236}">
-                <a16:creationId xmlns="" xmlns:a16="http://schemas.microsoft.com/office/drawing/2014/main" id="{0BB708B0-698E-42C2-BF1A-B261A6359643}"/>
+                <a16:creationId xmlns:a16="http://schemas.microsoft.com/office/drawing/2014/main" xmlns="" id="{0BB708B0-698E-42C2-BF1A-B261A6359643}"/>
               </a:ext>
             </a:extLst>
           </p:cNvPr>
@@ -3233,7 +3329,7 @@
           <p:cNvPr id="3" name="Title">
             <a:extLst>
               <a:ext uri="{FF2B5EF4-FFF2-40B4-BE49-F238E27FC236}">
-                <a16:creationId xmlns="" xmlns:a16="http://schemas.microsoft.com/office/drawing/2014/main" id="{A6D0DA0B-E6D0-4C7E-B3D7-BE548DAB52B0}"/>
+                <a16:creationId xmlns:a16="http://schemas.microsoft.com/office/drawing/2014/main" xmlns="" id="{A6D0DA0B-E6D0-4C7E-B3D7-BE548DAB52B0}"/>
               </a:ext>
             </a:extLst>
           </p:cNvPr>
@@ -3464,7 +3560,7 @@
           <p:cNvPr id="2" name="Left column">
             <a:extLst>
               <a:ext uri="{FF2B5EF4-FFF2-40B4-BE49-F238E27FC236}">
-                <a16:creationId xmlns="" xmlns:a16="http://schemas.microsoft.com/office/drawing/2014/main" id="{D70694F0-5775-43C1-B335-B957C6F69743}"/>
+                <a16:creationId xmlns:a16="http://schemas.microsoft.com/office/drawing/2014/main" xmlns="" id="{D70694F0-5775-43C1-B335-B957C6F69743}"/>
               </a:ext>
             </a:extLst>
           </p:cNvPr>
@@ -4066,7 +4162,7 @@
           <p:cNvPr id="9" name="heading">
             <a:extLst>
               <a:ext uri="{FF2B5EF4-FFF2-40B4-BE49-F238E27FC236}">
-                <a16:creationId xmlns="" xmlns:a16="http://schemas.microsoft.com/office/drawing/2014/main" id="{E1035A23-796B-4472-B7B6-D0EAE2BD4A79}"/>
+                <a16:creationId xmlns:a16="http://schemas.microsoft.com/office/drawing/2014/main" xmlns="" id="{E1035A23-796B-4472-B7B6-D0EAE2BD4A79}"/>
               </a:ext>
             </a:extLst>
           </p:cNvPr>
@@ -4225,7 +4321,7 @@
           <p:cNvPr id="2" name="page">
             <a:extLst>
               <a:ext uri="{FF2B5EF4-FFF2-40B4-BE49-F238E27FC236}">
-                <a16:creationId xmlns="" xmlns:a16="http://schemas.microsoft.com/office/drawing/2014/main" id="{08B38101-2A3E-459F-853E-3795D74175BD}"/>
+                <a16:creationId xmlns:a16="http://schemas.microsoft.com/office/drawing/2014/main" xmlns="" id="{08B38101-2A3E-459F-853E-3795D74175BD}"/>
               </a:ext>
             </a:extLst>
           </p:cNvPr>
@@ -4384,7 +4480,7 @@
           <p:cNvPr id="3" name="main-title">
             <a:extLst>
               <a:ext uri="{FF2B5EF4-FFF2-40B4-BE49-F238E27FC236}">
-                <a16:creationId xmlns="" xmlns:a16="http://schemas.microsoft.com/office/drawing/2014/main" id="{EF7C45E8-6B8E-4D85-9EFA-A871C3FB121F}"/>
+                <a16:creationId xmlns:a16="http://schemas.microsoft.com/office/drawing/2014/main" xmlns="" id="{EF7C45E8-6B8E-4D85-9EFA-A871C3FB121F}"/>
               </a:ext>
             </a:extLst>
           </p:cNvPr>
@@ -4584,7 +4680,7 @@
           <p:cNvPr id="7" name="objective">
             <a:extLst>
               <a:ext uri="{FF2B5EF4-FFF2-40B4-BE49-F238E27FC236}">
-                <a16:creationId xmlns="" xmlns:a16="http://schemas.microsoft.com/office/drawing/2014/main" id="{E3DB2971-607B-42C5-ADDB-D08000755050}"/>
+                <a16:creationId xmlns:a16="http://schemas.microsoft.com/office/drawing/2014/main" xmlns="" id="{E3DB2971-607B-42C5-ADDB-D08000755050}"/>
               </a:ext>
             </a:extLst>
           </p:cNvPr>
@@ -4787,7 +4883,7 @@
           <p:cNvPr id="8" name="author">
             <a:extLst>
               <a:ext uri="{FF2B5EF4-FFF2-40B4-BE49-F238E27FC236}">
-                <a16:creationId xmlns="" xmlns:a16="http://schemas.microsoft.com/office/drawing/2014/main" id="{37AC8713-B396-4F5C-91D4-379A42B6D03F}"/>
+                <a16:creationId xmlns:a16="http://schemas.microsoft.com/office/drawing/2014/main" xmlns="" id="{37AC8713-B396-4F5C-91D4-379A42B6D03F}"/>
               </a:ext>
             </a:extLst>
           </p:cNvPr>
@@ -5016,7 +5112,7 @@
     </p:spTree>
     <p:extLst>
       <p:ext uri="{BB962C8B-B14F-4D97-AF65-F5344CB8AC3E}">
-        <p14:creationId xmlns="" xmlns:p14="http://schemas.microsoft.com/office/powerpoint/2010/main" val="1094569892"/>
+        <p14:creationId xmlns:p14="http://schemas.microsoft.com/office/powerpoint/2010/main" xmlns="" val="1094569892"/>
       </p:ext>
     </p:extLst>
   </p:cSld>
@@ -5063,7 +5159,7 @@
           <p:cNvPr id="10" name="heading">
             <a:extLst>
               <a:ext uri="{FF2B5EF4-FFF2-40B4-BE49-F238E27FC236}">
-                <a16:creationId xmlns="" xmlns:a16="http://schemas.microsoft.com/office/drawing/2014/main" id="{79966C29-F1A8-4666-B75F-C93D838D4B4F}"/>
+                <a16:creationId xmlns:a16="http://schemas.microsoft.com/office/drawing/2014/main" xmlns="" id="{79966C29-F1A8-4666-B75F-C93D838D4B4F}"/>
               </a:ext>
             </a:extLst>
           </p:cNvPr>
@@ -5222,7 +5318,7 @@
           <p:cNvPr id="2" name="page">
             <a:extLst>
               <a:ext uri="{FF2B5EF4-FFF2-40B4-BE49-F238E27FC236}">
-                <a16:creationId xmlns="" xmlns:a16="http://schemas.microsoft.com/office/drawing/2014/main" id="{AD8D2CDA-6E09-468D-ABFD-954A847674FD}"/>
+                <a16:creationId xmlns:a16="http://schemas.microsoft.com/office/drawing/2014/main" xmlns="" id="{AD8D2CDA-6E09-468D-ABFD-954A847674FD}"/>
               </a:ext>
             </a:extLst>
           </p:cNvPr>
@@ -5381,7 +5477,7 @@
           <p:cNvPr id="3" name="html-owner">
             <a:extLst>
               <a:ext uri="{FF2B5EF4-FFF2-40B4-BE49-F238E27FC236}">
-                <a16:creationId xmlns="" xmlns:a16="http://schemas.microsoft.com/office/drawing/2014/main" id="{3ADAF179-F02E-41BB-8F23-37F69122B950}"/>
+                <a16:creationId xmlns:a16="http://schemas.microsoft.com/office/drawing/2014/main" xmlns="" id="{3ADAF179-F02E-41BB-8F23-37F69122B950}"/>
               </a:ext>
             </a:extLst>
           </p:cNvPr>
@@ -5581,7 +5677,7 @@
           <p:cNvPr id="4" name="code">
             <a:extLst>
               <a:ext uri="{FF2B5EF4-FFF2-40B4-BE49-F238E27FC236}">
-                <a16:creationId xmlns="" xmlns:a16="http://schemas.microsoft.com/office/drawing/2014/main" id="{18DE6B3E-9C2E-4F70-9AE9-68D3922F7CF8}"/>
+                <a16:creationId xmlns:a16="http://schemas.microsoft.com/office/drawing/2014/main" xmlns="" id="{18DE6B3E-9C2E-4F70-9AE9-68D3922F7CF8}"/>
               </a:ext>
             </a:extLst>
           </p:cNvPr>
@@ -5761,7 +5857,7 @@
     </p:spTree>
     <p:extLst>
       <p:ext uri="{BB962C8B-B14F-4D97-AF65-F5344CB8AC3E}">
-        <p14:creationId xmlns="" xmlns:p14="http://schemas.microsoft.com/office/powerpoint/2010/main" val="1117606016"/>
+        <p14:creationId xmlns:p14="http://schemas.microsoft.com/office/powerpoint/2010/main" xmlns="" val="1117606016"/>
       </p:ext>
     </p:extLst>
   </p:cSld>
@@ -5808,7 +5904,7 @@
           <p:cNvPr id="8" name="heading">
             <a:extLst>
               <a:ext uri="{FF2B5EF4-FFF2-40B4-BE49-F238E27FC236}">
-                <a16:creationId xmlns="" xmlns:a16="http://schemas.microsoft.com/office/drawing/2014/main" id="{AAF28E54-4E81-482B-9AC8-C16C7F36BFF3}"/>
+                <a16:creationId xmlns:a16="http://schemas.microsoft.com/office/drawing/2014/main" xmlns="" id="{AAF28E54-4E81-482B-9AC8-C16C7F36BFF3}"/>
               </a:ext>
             </a:extLst>
           </p:cNvPr>
@@ -5975,7 +6071,7 @@
           <p:cNvPr id="2" name="page">
             <a:extLst>
               <a:ext uri="{FF2B5EF4-FFF2-40B4-BE49-F238E27FC236}">
-                <a16:creationId xmlns="" xmlns:a16="http://schemas.microsoft.com/office/drawing/2014/main" id="{24276D62-64BD-434A-94AD-3D0FCC94ED20}"/>
+                <a16:creationId xmlns:a16="http://schemas.microsoft.com/office/drawing/2014/main" xmlns="" id="{24276D62-64BD-434A-94AD-3D0FCC94ED20}"/>
               </a:ext>
             </a:extLst>
           </p:cNvPr>
@@ -6157,15 +6253,7 @@
                   <a:schemeClr val="bg1"/>
                 </a:solidFill>
               </a:rPr>
-              <a:t>WHATWG</a:t>
-            </a:r>
-            <a:r>
-              <a:rPr lang="pt-BR" b="1" dirty="0" smtClean="0">
-                <a:solidFill>
-                  <a:schemeClr val="bg1"/>
-                </a:solidFill>
-              </a:rPr>
-              <a:t>.</a:t>
+              <a:t>WHATWG.</a:t>
             </a:r>
             <a:r>
               <a:rPr lang="pt-BR" dirty="0" smtClean="0">
@@ -6198,16 +6286,7 @@
                 </a:solidFill>
                 <a:hlinkClick r:id="rId3"/>
               </a:rPr>
-              <a:t>https://html.spec.whatwg.org</a:t>
-            </a:r>
-            <a:r>
-              <a:rPr lang="pt-BR" dirty="0" smtClean="0">
-                <a:solidFill>
-                  <a:schemeClr val="bg1"/>
-                </a:solidFill>
-                <a:hlinkClick r:id="rId3"/>
-              </a:rPr>
-              <a:t>/</a:t>
+              <a:t>https://html.spec.whatwg.org/</a:t>
             </a:r>
             <a:r>
               <a:rPr lang="pt-BR" dirty="0" smtClean="0">
@@ -6289,16 +6368,7 @@
                 </a:solidFill>
                 <a:hlinkClick r:id="rId4"/>
               </a:rPr>
-              <a:t>https://www.w3.org/Style/CSS</a:t>
-            </a:r>
-            <a:r>
-              <a:rPr lang="pt-BR" dirty="0" smtClean="0">
-                <a:solidFill>
-                  <a:schemeClr val="bg1"/>
-                </a:solidFill>
-                <a:hlinkClick r:id="rId4"/>
-              </a:rPr>
-              <a:t>/</a:t>
+              <a:t>https://www.w3.org/Style/CSS/</a:t>
             </a:r>
             <a:r>
               <a:rPr lang="pt-BR" dirty="0" smtClean="0">
@@ -6420,16 +6490,7 @@
                 </a:solidFill>
                 <a:hlinkClick r:id="rId5"/>
               </a:rPr>
-              <a:t>https://ecma-international.org/publications-and-standards/standards/ecma-262</a:t>
-            </a:r>
-            <a:r>
-              <a:rPr lang="pt-BR" dirty="0" smtClean="0">
-                <a:solidFill>
-                  <a:schemeClr val="bg1"/>
-                </a:solidFill>
-                <a:hlinkClick r:id="rId5"/>
-              </a:rPr>
-              <a:t>/</a:t>
+              <a:t>https://ecma-international.org/publications-and-standards/standards/ecma-262/</a:t>
             </a:r>
             <a:r>
               <a:rPr lang="pt-BR" dirty="0" smtClean="0">
@@ -6524,7 +6585,460 @@
     </p:spTree>
     <p:extLst>
       <p:ext uri="{BB962C8B-B14F-4D97-AF65-F5344CB8AC3E}">
-        <p14:creationId xmlns="" xmlns:p14="http://schemas.microsoft.com/office/powerpoint/2010/main" val="1808442186"/>
+        <p14:creationId xmlns:p14="http://schemas.microsoft.com/office/powerpoint/2010/main" xmlns="" val="1808442186"/>
+      </p:ext>
+    </p:extLst>
+  </p:cSld>
+  <p:clrMapOvr>
+    <a:masterClrMapping/>
+  </p:clrMapOvr>
+  <p:timing>
+    <p:tnLst>
+      <p:par>
+        <p:cTn id="1" dur="indefinite" restart="never" nodeType="tmRoot"/>
+      </p:par>
+    </p:tnLst>
+  </p:timing>
+</p:sld>
+</file>
+
+<file path=ppt/slides/slide12.xml><?xml version="1.0" encoding="utf-8"?>
+<p:sld xmlns:a="http://schemas.openxmlformats.org/drawingml/2006/main" xmlns:r="http://schemas.openxmlformats.org/officeDocument/2006/relationships" xmlns:p="http://schemas.openxmlformats.org/presentationml/2006/main">
+  <p:cSld>
+    <p:bg>
+      <p:bgPr>
+        <a:solidFill>
+          <a:srgbClr val="0D1727"/>
+        </a:solidFill>
+        <a:effectLst/>
+      </p:bgPr>
+    </p:bg>
+    <p:spTree>
+      <p:nvGrpSpPr>
+        <p:cNvPr id="1" name=""/>
+        <p:cNvGrpSpPr/>
+        <p:nvPr/>
+      </p:nvGrpSpPr>
+      <p:grpSpPr>
+        <a:xfrm>
+          <a:off x="0" y="0"/>
+          <a:ext cx="0" cy="0"/>
+          <a:chOff x="0" y="0"/>
+          <a:chExt cx="0" cy="0"/>
+        </a:xfrm>
+      </p:grpSpPr>
+      <p:sp>
+        <p:nvSpPr>
+          <p:cNvPr id="8" name="heading">
+            <a:extLst>
+              <a:ext uri="{FF2B5EF4-FFF2-40B4-BE49-F238E27FC236}">
+                <a16:creationId xmlns:a16="http://schemas.microsoft.com/office/drawing/2014/main" xmlns="" id="{AAF28E54-4E81-482B-9AC8-C16C7F36BFF3}"/>
+              </a:ext>
+            </a:extLst>
+          </p:cNvPr>
+          <p:cNvSpPr>
+            <a:spLocks noGrp="1"/>
+          </p:cNvSpPr>
+          <p:nvPr/>
+        </p:nvSpPr>
+        <p:spPr>
+          <a:xfrm>
+            <a:off x="809588" y="2143116"/>
+            <a:ext cx="9915556" cy="642921"/>
+          </a:xfrm>
+          <a:prstGeom prst="rect">
+            <a:avLst/>
+          </a:prstGeom>
+          <a:noFill/>
+          <a:ln w="0">
+            <a:noFill/>
+            <a:prstDash val="solid"/>
+          </a:ln>
+        </p:spPr>
+        <p:txBody>
+          <a:bodyPr wrap="none" lIns="0" tIns="0" rIns="0" bIns="0">
+            <a:noAutofit/>
+          </a:bodyPr>
+          <a:lstStyle>
+            <a:defPPr>
+              <a:defRPr sz="3150" b="1">
+                <a:solidFill>
+                  <a:srgbClr val="F7FAFF"/>
+                </a:solidFill>
+                <a:latin typeface="DejaVu Sans"/>
+                <a:ea typeface="DejaVu Sans"/>
+                <a:cs typeface="DejaVu Sans"/>
+              </a:defRPr>
+            </a:defPPr>
+            <a:lvl1pPr>
+              <a:defRPr sz="3150" b="1">
+                <a:solidFill>
+                  <a:srgbClr val="F7FAFF"/>
+                </a:solidFill>
+                <a:latin typeface="DejaVu Sans"/>
+                <a:ea typeface="DejaVu Sans"/>
+                <a:cs typeface="DejaVu Sans"/>
+              </a:defRPr>
+            </a:lvl1pPr>
+            <a:lvl2pPr>
+              <a:defRPr sz="3150" b="1">
+                <a:solidFill>
+                  <a:srgbClr val="F7FAFF"/>
+                </a:solidFill>
+                <a:latin typeface="DejaVu Sans"/>
+                <a:ea typeface="DejaVu Sans"/>
+                <a:cs typeface="DejaVu Sans"/>
+              </a:defRPr>
+            </a:lvl2pPr>
+            <a:lvl3pPr>
+              <a:defRPr sz="3150" b="1">
+                <a:solidFill>
+                  <a:srgbClr val="F7FAFF"/>
+                </a:solidFill>
+                <a:latin typeface="DejaVu Sans"/>
+                <a:ea typeface="DejaVu Sans"/>
+                <a:cs typeface="DejaVu Sans"/>
+              </a:defRPr>
+            </a:lvl3pPr>
+            <a:lvl4pPr>
+              <a:defRPr sz="3150" b="1">
+                <a:solidFill>
+                  <a:srgbClr val="F7FAFF"/>
+                </a:solidFill>
+                <a:latin typeface="DejaVu Sans"/>
+                <a:ea typeface="DejaVu Sans"/>
+                <a:cs typeface="DejaVu Sans"/>
+              </a:defRPr>
+            </a:lvl4pPr>
+            <a:lvl5pPr>
+              <a:defRPr sz="3150" b="1">
+                <a:solidFill>
+                  <a:srgbClr val="F7FAFF"/>
+                </a:solidFill>
+                <a:latin typeface="DejaVu Sans"/>
+                <a:ea typeface="DejaVu Sans"/>
+                <a:cs typeface="DejaVu Sans"/>
+              </a:defRPr>
+            </a:lvl5pPr>
+            <a:lvl6pPr>
+              <a:defRPr sz="3150" b="1">
+                <a:solidFill>
+                  <a:srgbClr val="F7FAFF"/>
+                </a:solidFill>
+                <a:latin typeface="DejaVu Sans"/>
+                <a:ea typeface="DejaVu Sans"/>
+                <a:cs typeface="DejaVu Sans"/>
+              </a:defRPr>
+            </a:lvl6pPr>
+            <a:lvl7pPr>
+              <a:defRPr sz="3150" b="1">
+                <a:solidFill>
+                  <a:srgbClr val="F7FAFF"/>
+                </a:solidFill>
+                <a:latin typeface="DejaVu Sans"/>
+                <a:ea typeface="DejaVu Sans"/>
+                <a:cs typeface="DejaVu Sans"/>
+              </a:defRPr>
+            </a:lvl7pPr>
+            <a:lvl8pPr>
+              <a:defRPr sz="3150" b="1">
+                <a:solidFill>
+                  <a:srgbClr val="F7FAFF"/>
+                </a:solidFill>
+                <a:latin typeface="DejaVu Sans"/>
+                <a:ea typeface="DejaVu Sans"/>
+                <a:cs typeface="DejaVu Sans"/>
+              </a:defRPr>
+            </a:lvl8pPr>
+            <a:lvl9pPr>
+              <a:defRPr sz="3150" b="1">
+                <a:solidFill>
+                  <a:srgbClr val="F7FAFF"/>
+                </a:solidFill>
+                <a:latin typeface="DejaVu Sans"/>
+                <a:ea typeface="DejaVu Sans"/>
+                <a:cs typeface="DejaVu Sans"/>
+              </a:defRPr>
+            </a:lvl9pPr>
+          </a:lstStyle>
+          <a:p>
+            <a:pPr algn="ctr">
+              <a:defRPr sz="3150" b="1">
+                <a:solidFill>
+                  <a:srgbClr val="F7FAFF"/>
+                </a:solidFill>
+                <a:latin typeface="DejaVu Sans"/>
+                <a:ea typeface="DejaVu Sans"/>
+                <a:cs typeface="DejaVu Sans"/>
+              </a:defRPr>
+            </a:pPr>
+            <a:r>
+              <a:rPr lang="pt-BR" sz="4400" dirty="0" smtClean="0">
+                <a:solidFill>
+                  <a:schemeClr val="bg1"/>
+                </a:solidFill>
+              </a:rPr>
+              <a:t>https://github.com/etecprofgiulianie-lab</a:t>
+            </a:r>
+            <a:r>
+              <a:rPr lang="pt-BR" sz="4400" dirty="0" smtClean="0">
+                <a:solidFill>
+                  <a:schemeClr val="bg1"/>
+                </a:solidFill>
+              </a:rPr>
+              <a:t>/</a:t>
+            </a:r>
+          </a:p>
+          <a:p>
+            <a:pPr algn="ctr">
+              <a:defRPr sz="3150" b="1">
+                <a:solidFill>
+                  <a:srgbClr val="F7FAFF"/>
+                </a:solidFill>
+                <a:latin typeface="DejaVu Sans"/>
+                <a:ea typeface="DejaVu Sans"/>
+                <a:cs typeface="DejaVu Sans"/>
+              </a:defRPr>
+            </a:pPr>
+            <a:r>
+              <a:rPr lang="pt-BR" sz="4400" dirty="0" err="1" smtClean="0">
+                <a:solidFill>
+                  <a:schemeClr val="bg1"/>
+                </a:solidFill>
+              </a:rPr>
+              <a:t>aula_teste_exemplos</a:t>
+            </a:r>
+            <a:r>
+              <a:rPr lang="pt-BR" sz="4400" dirty="0" smtClean="0">
+                <a:solidFill>
+                  <a:schemeClr val="bg1"/>
+                </a:solidFill>
+              </a:rPr>
+              <a:t>.</a:t>
+            </a:r>
+            <a:r>
+              <a:rPr lang="pt-BR" sz="4400" dirty="0" err="1" smtClean="0">
+                <a:solidFill>
+                  <a:schemeClr val="bg1"/>
+                </a:solidFill>
+              </a:rPr>
+              <a:t>git</a:t>
+            </a:r>
+            <a:endParaRPr lang="pt-BR" sz="4400" dirty="0" smtClean="0">
+              <a:solidFill>
+                <a:schemeClr val="bg1"/>
+              </a:solidFill>
+            </a:endParaRPr>
+          </a:p>
+          <a:p>
+            <a:pPr>
+              <a:defRPr sz="3150" b="1">
+                <a:solidFill>
+                  <a:srgbClr val="F7FAFF"/>
+                </a:solidFill>
+                <a:latin typeface="DejaVu Sans"/>
+                <a:ea typeface="DejaVu Sans"/>
+                <a:cs typeface="DejaVu Sans"/>
+              </a:defRPr>
+            </a:pPr>
+            <a:endParaRPr sz="4000" b="1">
+              <a:solidFill>
+                <a:srgbClr val="F7FAFF"/>
+              </a:solidFill>
+              <a:latin typeface="DejaVu Sans"/>
+              <a:ea typeface="DejaVu Sans"/>
+              <a:cs typeface="DejaVu Sans"/>
+            </a:endParaRPr>
+          </a:p>
+        </p:txBody>
+      </p:sp>
+      <p:sp>
+        <p:nvSpPr>
+          <p:cNvPr id="2" name="page">
+            <a:extLst>
+              <a:ext uri="{FF2B5EF4-FFF2-40B4-BE49-F238E27FC236}">
+                <a16:creationId xmlns:a16="http://schemas.microsoft.com/office/drawing/2014/main" xmlns="" id="{24276D62-64BD-434A-94AD-3D0FCC94ED20}"/>
+              </a:ext>
+            </a:extLst>
+          </p:cNvPr>
+          <p:cNvSpPr>
+            <a:spLocks noGrp="1"/>
+          </p:cNvSpPr>
+          <p:nvPr/>
+        </p:nvSpPr>
+        <p:spPr>
+          <a:xfrm>
+            <a:off x="10953750" y="6334125"/>
+            <a:ext cx="619125" cy="285750"/>
+          </a:xfrm>
+          <a:prstGeom prst="rect">
+            <a:avLst/>
+          </a:prstGeom>
+          <a:noFill/>
+          <a:ln w="0">
+            <a:noFill/>
+            <a:prstDash val="solid"/>
+          </a:ln>
+        </p:spPr>
+        <p:txBody>
+          <a:bodyPr wrap="none" lIns="0" tIns="0" rIns="0" bIns="0">
+            <a:noAutofit/>
+          </a:bodyPr>
+          <a:lstStyle>
+            <a:defPPr>
+              <a:defRPr sz="1200" b="0">
+                <a:solidFill>
+                  <a:srgbClr val="B7C5D9"/>
+                </a:solidFill>
+                <a:latin typeface="DejaVu Sans"/>
+                <a:ea typeface="DejaVu Sans"/>
+                <a:cs typeface="DejaVu Sans"/>
+              </a:defRPr>
+            </a:defPPr>
+            <a:lvl1pPr>
+              <a:defRPr sz="1200" b="0">
+                <a:solidFill>
+                  <a:srgbClr val="B7C5D9"/>
+                </a:solidFill>
+                <a:latin typeface="DejaVu Sans"/>
+                <a:ea typeface="DejaVu Sans"/>
+                <a:cs typeface="DejaVu Sans"/>
+              </a:defRPr>
+            </a:lvl1pPr>
+            <a:lvl2pPr>
+              <a:defRPr sz="1200" b="0">
+                <a:solidFill>
+                  <a:srgbClr val="B7C5D9"/>
+                </a:solidFill>
+                <a:latin typeface="DejaVu Sans"/>
+                <a:ea typeface="DejaVu Sans"/>
+                <a:cs typeface="DejaVu Sans"/>
+              </a:defRPr>
+            </a:lvl2pPr>
+            <a:lvl3pPr>
+              <a:defRPr sz="1200" b="0">
+                <a:solidFill>
+                  <a:srgbClr val="B7C5D9"/>
+                </a:solidFill>
+                <a:latin typeface="DejaVu Sans"/>
+                <a:ea typeface="DejaVu Sans"/>
+                <a:cs typeface="DejaVu Sans"/>
+              </a:defRPr>
+            </a:lvl3pPr>
+            <a:lvl4pPr>
+              <a:defRPr sz="1200" b="0">
+                <a:solidFill>
+                  <a:srgbClr val="B7C5D9"/>
+                </a:solidFill>
+                <a:latin typeface="DejaVu Sans"/>
+                <a:ea typeface="DejaVu Sans"/>
+                <a:cs typeface="DejaVu Sans"/>
+              </a:defRPr>
+            </a:lvl4pPr>
+            <a:lvl5pPr>
+              <a:defRPr sz="1200" b="0">
+                <a:solidFill>
+                  <a:srgbClr val="B7C5D9"/>
+                </a:solidFill>
+                <a:latin typeface="DejaVu Sans"/>
+                <a:ea typeface="DejaVu Sans"/>
+                <a:cs typeface="DejaVu Sans"/>
+              </a:defRPr>
+            </a:lvl5pPr>
+            <a:lvl6pPr>
+              <a:defRPr sz="1200" b="0">
+                <a:solidFill>
+                  <a:srgbClr val="B7C5D9"/>
+                </a:solidFill>
+                <a:latin typeface="DejaVu Sans"/>
+                <a:ea typeface="DejaVu Sans"/>
+                <a:cs typeface="DejaVu Sans"/>
+              </a:defRPr>
+            </a:lvl6pPr>
+            <a:lvl7pPr>
+              <a:defRPr sz="1200" b="0">
+                <a:solidFill>
+                  <a:srgbClr val="B7C5D9"/>
+                </a:solidFill>
+                <a:latin typeface="DejaVu Sans"/>
+                <a:ea typeface="DejaVu Sans"/>
+                <a:cs typeface="DejaVu Sans"/>
+              </a:defRPr>
+            </a:lvl7pPr>
+            <a:lvl8pPr>
+              <a:defRPr sz="1200" b="0">
+                <a:solidFill>
+                  <a:srgbClr val="B7C5D9"/>
+                </a:solidFill>
+                <a:latin typeface="DejaVu Sans"/>
+                <a:ea typeface="DejaVu Sans"/>
+                <a:cs typeface="DejaVu Sans"/>
+              </a:defRPr>
+            </a:lvl8pPr>
+            <a:lvl9pPr>
+              <a:defRPr sz="1200" b="0">
+                <a:solidFill>
+                  <a:srgbClr val="B7C5D9"/>
+                </a:solidFill>
+                <a:latin typeface="DejaVu Sans"/>
+                <a:ea typeface="DejaVu Sans"/>
+                <a:cs typeface="DejaVu Sans"/>
+              </a:defRPr>
+            </a:lvl9pPr>
+          </a:lstStyle>
+          <a:p>
+            <a:pPr>
+              <a:defRPr sz="1200" b="0">
+                <a:solidFill>
+                  <a:srgbClr val="B7C5D9"/>
+                </a:solidFill>
+                <a:latin typeface="DejaVu Sans"/>
+                <a:ea typeface="DejaVu Sans"/>
+                <a:cs typeface="DejaVu Sans"/>
+              </a:defRPr>
+            </a:pPr>
+            <a:r>
+              <a:rPr sz="1200" b="0">
+                <a:solidFill>
+                  <a:srgbClr val="B7C5D9"/>
+                </a:solidFill>
+                <a:latin typeface="DejaVu Sans"/>
+                <a:ea typeface="DejaVu Sans"/>
+                <a:cs typeface="DejaVu Sans"/>
+              </a:rPr>
+              <a:t>13</a:t>
+            </a:r>
+          </a:p>
+        </p:txBody>
+      </p:sp>
+      <p:pic>
+        <p:nvPicPr>
+          <p:cNvPr id="5" name="Imagem 4" descr="Git-Logo-White.png"/>
+          <p:cNvPicPr>
+            <a:picLocks noChangeAspect="1"/>
+          </p:cNvPicPr>
+          <p:nvPr/>
+        </p:nvPicPr>
+        <p:blipFill>
+          <a:blip r:embed="rId3"/>
+          <a:stretch>
+            <a:fillRect/>
+          </a:stretch>
+        </p:blipFill>
+        <p:spPr>
+          <a:xfrm>
+            <a:off x="4095736" y="4000504"/>
+            <a:ext cx="3308235" cy="1387792"/>
+          </a:xfrm>
+          <a:prstGeom prst="rect">
+            <a:avLst/>
+          </a:prstGeom>
+        </p:spPr>
+      </p:pic>
+    </p:spTree>
+    <p:extLst>
+      <p:ext uri="{BB962C8B-B14F-4D97-AF65-F5344CB8AC3E}">
+        <p14:creationId xmlns:p14="http://schemas.microsoft.com/office/powerpoint/2010/main" xmlns="" val="1808442186"/>
       </p:ext>
     </p:extLst>
   </p:cSld>
@@ -6571,7 +7085,7 @@
           <p:cNvPr id="9" name="heading">
             <a:extLst>
               <a:ext uri="{FF2B5EF4-FFF2-40B4-BE49-F238E27FC236}">
-                <a16:creationId xmlns="" xmlns:a16="http://schemas.microsoft.com/office/drawing/2014/main" id="{67DE51B7-6468-4139-8E7A-9332E694BA8E}"/>
+                <a16:creationId xmlns:a16="http://schemas.microsoft.com/office/drawing/2014/main" xmlns="" id="{67DE51B7-6468-4139-8E7A-9332E694BA8E}"/>
               </a:ext>
             </a:extLst>
           </p:cNvPr>
@@ -6738,7 +7252,7 @@
           <p:cNvPr id="2" name="page">
             <a:extLst>
               <a:ext uri="{FF2B5EF4-FFF2-40B4-BE49-F238E27FC236}">
-                <a16:creationId xmlns="" xmlns:a16="http://schemas.microsoft.com/office/drawing/2014/main" id="{CDD08345-0AD8-4C32-A8D5-A91969658C05}"/>
+                <a16:creationId xmlns:a16="http://schemas.microsoft.com/office/drawing/2014/main" xmlns="" id="{CDD08345-0AD8-4C32-A8D5-A91969658C05}"/>
               </a:ext>
             </a:extLst>
           </p:cNvPr>
@@ -6897,7 +7411,7 @@
           <p:cNvPr id="3" name="definition">
             <a:extLst>
               <a:ext uri="{FF2B5EF4-FFF2-40B4-BE49-F238E27FC236}">
-                <a16:creationId xmlns="" xmlns:a16="http://schemas.microsoft.com/office/drawing/2014/main" id="{0D9260F9-0491-4E15-80AC-78E4B4839954}"/>
+                <a16:creationId xmlns:a16="http://schemas.microsoft.com/office/drawing/2014/main" xmlns="" id="{0D9260F9-0491-4E15-80AC-78E4B4839954}"/>
               </a:ext>
             </a:extLst>
           </p:cNvPr>
@@ -7125,31 +7639,7 @@
             </a:pPr>
             <a:r>
               <a:rPr lang="pt-BR" sz="2400" dirty="0" smtClean="0"/>
-              <a:t>unidas </a:t>
-            </a:r>
-            <a:r>
-              <a:rPr lang="pt-BR" sz="2400" dirty="0" smtClean="0"/>
-              <a:t>por um </a:t>
-            </a:r>
-            <a:r>
-              <a:rPr lang="pt-BR" sz="2400" dirty="0" smtClean="0"/>
-              <a:t>nome </a:t>
-            </a:r>
-            <a:r>
-              <a:rPr lang="pt-BR" sz="2400" dirty="0" smtClean="0"/>
-              <a:t>de domínio comum e exibidas </a:t>
-            </a:r>
-            <a:r>
-              <a:rPr lang="pt-BR" sz="2400" dirty="0" smtClean="0"/>
-              <a:t>por </a:t>
-            </a:r>
-            <a:r>
-              <a:rPr lang="pt-BR" sz="2400" dirty="0" smtClean="0"/>
-              <a:t>meio de servidores</a:t>
-            </a:r>
-            <a:r>
-              <a:rPr lang="pt-BR" sz="2400" dirty="0" smtClean="0"/>
-              <a:t>.</a:t>
+              <a:t>unidas por um nome de domínio comum e exibidas por meio de servidores.</a:t>
             </a:r>
           </a:p>
           <a:p>
@@ -7181,27 +7671,7 @@
             </a:pPr>
             <a:r>
               <a:rPr lang="pt-BR" sz="2400" dirty="0" smtClean="0"/>
-              <a:t>É </a:t>
-            </a:r>
-            <a:r>
-              <a:rPr lang="pt-BR" sz="2400" dirty="0" smtClean="0"/>
-              <a:t>essencialmente o "lar" de todas as </a:t>
-            </a:r>
-            <a:r>
-              <a:rPr lang="pt-BR" sz="2400" dirty="0" smtClean="0"/>
-              <a:t>informações </a:t>
-            </a:r>
-            <a:r>
-              <a:rPr lang="pt-BR" sz="2400" dirty="0" smtClean="0"/>
-              <a:t>que você </a:t>
-            </a:r>
-            <a:r>
-              <a:rPr lang="pt-BR" sz="2400" dirty="0" smtClean="0"/>
-              <a:t>deseja </a:t>
-            </a:r>
-            <a:r>
-              <a:rPr lang="pt-BR" sz="2400" dirty="0" smtClean="0"/>
-              <a:t>divulgar na internet. </a:t>
+              <a:t>É essencialmente o "lar" de todas as informações que você deseja divulgar na internet. </a:t>
             </a:r>
             <a:endParaRPr sz="2400" b="0">
               <a:solidFill>
@@ -7219,7 +7689,7 @@
           <p:cNvPr id="4" name="site-example">
             <a:extLst>
               <a:ext uri="{FF2B5EF4-FFF2-40B4-BE49-F238E27FC236}">
-                <a16:creationId xmlns="" xmlns:a16="http://schemas.microsoft.com/office/drawing/2014/main" id="{1CF7B990-5A8A-4629-BE6B-63723B25FF84}"/>
+                <a16:creationId xmlns:a16="http://schemas.microsoft.com/office/drawing/2014/main" xmlns="" id="{1CF7B990-5A8A-4629-BE6B-63723B25FF84}"/>
               </a:ext>
             </a:extLst>
           </p:cNvPr>
@@ -7378,7 +7848,7 @@
           <p:cNvPr id="5" name="site-description">
             <a:extLst>
               <a:ext uri="{FF2B5EF4-FFF2-40B4-BE49-F238E27FC236}">
-                <a16:creationId xmlns="" xmlns:a16="http://schemas.microsoft.com/office/drawing/2014/main" id="{6EABF31C-C2E0-4A6A-B87D-2C4E48696122}"/>
+                <a16:creationId xmlns:a16="http://schemas.microsoft.com/office/drawing/2014/main" xmlns="" id="{6EABF31C-C2E0-4A6A-B87D-2C4E48696122}"/>
               </a:ext>
             </a:extLst>
           </p:cNvPr>
@@ -7537,7 +8007,7 @@
           <p:cNvPr id="6" name="page-example">
             <a:extLst>
               <a:ext uri="{FF2B5EF4-FFF2-40B4-BE49-F238E27FC236}">
-                <a16:creationId xmlns="" xmlns:a16="http://schemas.microsoft.com/office/drawing/2014/main" id="{6CC1FB99-8E4A-4F6F-8222-BB95A50D8E55}"/>
+                <a16:creationId xmlns:a16="http://schemas.microsoft.com/office/drawing/2014/main" xmlns="" id="{6CC1FB99-8E4A-4F6F-8222-BB95A50D8E55}"/>
               </a:ext>
             </a:extLst>
           </p:cNvPr>
@@ -7696,7 +8166,7 @@
           <p:cNvPr id="7" name="page-description">
             <a:extLst>
               <a:ext uri="{FF2B5EF4-FFF2-40B4-BE49-F238E27FC236}">
-                <a16:creationId xmlns="" xmlns:a16="http://schemas.microsoft.com/office/drawing/2014/main" id="{0CAD0112-B5FA-489E-B839-DC3106CFC69F}"/>
+                <a16:creationId xmlns:a16="http://schemas.microsoft.com/office/drawing/2014/main" xmlns="" id="{0CAD0112-B5FA-489E-B839-DC3106CFC69F}"/>
               </a:ext>
             </a:extLst>
           </p:cNvPr>
@@ -7901,7 +8371,7 @@
           <p:cNvPr id="8" name="distinction">
             <a:extLst>
               <a:ext uri="{FF2B5EF4-FFF2-40B4-BE49-F238E27FC236}">
-                <a16:creationId xmlns="" xmlns:a16="http://schemas.microsoft.com/office/drawing/2014/main" id="{1FCC58AD-275B-403A-A4DE-90B6FF66FA15}"/>
+                <a16:creationId xmlns:a16="http://schemas.microsoft.com/office/drawing/2014/main" xmlns="" id="{1FCC58AD-275B-403A-A4DE-90B6FF66FA15}"/>
               </a:ext>
             </a:extLst>
           </p:cNvPr>
@@ -8130,7 +8600,7 @@
     </p:spTree>
     <p:extLst>
       <p:ext uri="{BB962C8B-B14F-4D97-AF65-F5344CB8AC3E}">
-        <p14:creationId xmlns="" xmlns:p14="http://schemas.microsoft.com/office/powerpoint/2010/main" val="2076360615"/>
+        <p14:creationId xmlns:p14="http://schemas.microsoft.com/office/powerpoint/2010/main" xmlns="" val="2076360615"/>
       </p:ext>
     </p:extLst>
   </p:cSld>
@@ -8177,7 +8647,7 @@
           <p:cNvPr id="11" name="heading">
             <a:extLst>
               <a:ext uri="{FF2B5EF4-FFF2-40B4-BE49-F238E27FC236}">
-                <a16:creationId xmlns="" xmlns:a16="http://schemas.microsoft.com/office/drawing/2014/main" id="{9B7E0ABB-EA72-4DE5-ABB8-3BADD1DFC5B5}"/>
+                <a16:creationId xmlns:a16="http://schemas.microsoft.com/office/drawing/2014/main" xmlns="" id="{9B7E0ABB-EA72-4DE5-ABB8-3BADD1DFC5B5}"/>
               </a:ext>
             </a:extLst>
           </p:cNvPr>
@@ -8336,7 +8806,7 @@
           <p:cNvPr id="2" name="page">
             <a:extLst>
               <a:ext uri="{FF2B5EF4-FFF2-40B4-BE49-F238E27FC236}">
-                <a16:creationId xmlns="" xmlns:a16="http://schemas.microsoft.com/office/drawing/2014/main" id="{8B834980-BB61-4B89-85EC-2C0B07773FDF}"/>
+                <a16:creationId xmlns:a16="http://schemas.microsoft.com/office/drawing/2014/main" xmlns="" id="{8B834980-BB61-4B89-85EC-2C0B07773FDF}"/>
               </a:ext>
             </a:extLst>
           </p:cNvPr>
@@ -8495,7 +8965,7 @@
           <p:cNvPr id="3" name="definition">
             <a:extLst>
               <a:ext uri="{FF2B5EF4-FFF2-40B4-BE49-F238E27FC236}">
-                <a16:creationId xmlns="" xmlns:a16="http://schemas.microsoft.com/office/drawing/2014/main" id="{3B47818B-D8A1-4273-8C35-C64121B32498}"/>
+                <a16:creationId xmlns:a16="http://schemas.microsoft.com/office/drawing/2014/main" xmlns="" id="{3B47818B-D8A1-4273-8C35-C64121B32498}"/>
               </a:ext>
             </a:extLst>
           </p:cNvPr>
@@ -8654,7 +9124,7 @@
           <p:cNvPr id="4" name="html">
             <a:extLst>
               <a:ext uri="{FF2B5EF4-FFF2-40B4-BE49-F238E27FC236}">
-                <a16:creationId xmlns="" xmlns:a16="http://schemas.microsoft.com/office/drawing/2014/main" id="{28D1600E-C240-4EA4-8575-026D3CE5ED1E}"/>
+                <a16:creationId xmlns:a16="http://schemas.microsoft.com/office/drawing/2014/main" xmlns="" id="{28D1600E-C240-4EA4-8575-026D3CE5ED1E}"/>
               </a:ext>
             </a:extLst>
           </p:cNvPr>
@@ -8813,7 +9283,7 @@
           <p:cNvPr id="5" name="html-desc">
             <a:extLst>
               <a:ext uri="{FF2B5EF4-FFF2-40B4-BE49-F238E27FC236}">
-                <a16:creationId xmlns="" xmlns:a16="http://schemas.microsoft.com/office/drawing/2014/main" id="{79C8ABE9-78CD-4415-8FB8-399CD258E673}"/>
+                <a16:creationId xmlns:a16="http://schemas.microsoft.com/office/drawing/2014/main" xmlns="" id="{79C8ABE9-78CD-4415-8FB8-399CD258E673}"/>
               </a:ext>
             </a:extLst>
           </p:cNvPr>
@@ -8995,7 +9465,7 @@
           <p:cNvPr id="6" name="css">
             <a:extLst>
               <a:ext uri="{FF2B5EF4-FFF2-40B4-BE49-F238E27FC236}">
-                <a16:creationId xmlns="" xmlns:a16="http://schemas.microsoft.com/office/drawing/2014/main" id="{F37E8A9A-E2DA-45BE-990C-762EF695EFE5}"/>
+                <a16:creationId xmlns:a16="http://schemas.microsoft.com/office/drawing/2014/main" xmlns="" id="{F37E8A9A-E2DA-45BE-990C-762EF695EFE5}"/>
               </a:ext>
             </a:extLst>
           </p:cNvPr>
@@ -9154,7 +9624,7 @@
           <p:cNvPr id="7" name="css-desc">
             <a:extLst>
               <a:ext uri="{FF2B5EF4-FFF2-40B4-BE49-F238E27FC236}">
-                <a16:creationId xmlns="" xmlns:a16="http://schemas.microsoft.com/office/drawing/2014/main" id="{88E204AB-818A-4F6D-9C92-DE0D93C740DB}"/>
+                <a16:creationId xmlns:a16="http://schemas.microsoft.com/office/drawing/2014/main" xmlns="" id="{88E204AB-818A-4F6D-9C92-DE0D93C740DB}"/>
               </a:ext>
             </a:extLst>
           </p:cNvPr>
@@ -9336,7 +9806,7 @@
           <p:cNvPr id="8" name="js">
             <a:extLst>
               <a:ext uri="{FF2B5EF4-FFF2-40B4-BE49-F238E27FC236}">
-                <a16:creationId xmlns="" xmlns:a16="http://schemas.microsoft.com/office/drawing/2014/main" id="{FD98FD75-1172-4838-A251-85702B158352}"/>
+                <a16:creationId xmlns:a16="http://schemas.microsoft.com/office/drawing/2014/main" xmlns="" id="{FD98FD75-1172-4838-A251-85702B158352}"/>
               </a:ext>
             </a:extLst>
           </p:cNvPr>
@@ -9495,7 +9965,7 @@
           <p:cNvPr id="9" name="js-desc">
             <a:extLst>
               <a:ext uri="{FF2B5EF4-FFF2-40B4-BE49-F238E27FC236}">
-                <a16:creationId xmlns="" xmlns:a16="http://schemas.microsoft.com/office/drawing/2014/main" id="{F3937A4F-1486-42C9-B16C-ED94E3A3CF59}"/>
+                <a16:creationId xmlns:a16="http://schemas.microsoft.com/office/drawing/2014/main" xmlns="" id="{F3937A4F-1486-42C9-B16C-ED94E3A3CF59}"/>
               </a:ext>
             </a:extLst>
           </p:cNvPr>
@@ -9747,7 +10217,7 @@
     </p:spTree>
     <p:extLst>
       <p:ext uri="{BB962C8B-B14F-4D97-AF65-F5344CB8AC3E}">
-        <p14:creationId xmlns="" xmlns:p14="http://schemas.microsoft.com/office/powerpoint/2010/main" val="1380034106"/>
+        <p14:creationId xmlns:p14="http://schemas.microsoft.com/office/powerpoint/2010/main" xmlns="" val="1380034106"/>
       </p:ext>
     </p:extLst>
   </p:cSld>
@@ -9794,7 +10264,7 @@
           <p:cNvPr id="9" name="heading">
             <a:extLst>
               <a:ext uri="{FF2B5EF4-FFF2-40B4-BE49-F238E27FC236}">
-                <a16:creationId xmlns="" xmlns:a16="http://schemas.microsoft.com/office/drawing/2014/main" id="{D87FD98F-435E-48AB-B29D-28685F418B8A}"/>
+                <a16:creationId xmlns:a16="http://schemas.microsoft.com/office/drawing/2014/main" xmlns="" id="{D87FD98F-435E-48AB-B29D-28685F418B8A}"/>
               </a:ext>
             </a:extLst>
           </p:cNvPr>
@@ -9955,7 +10425,7 @@
           <p:cNvPr id="2" name="page">
             <a:extLst>
               <a:ext uri="{FF2B5EF4-FFF2-40B4-BE49-F238E27FC236}">
-                <a16:creationId xmlns="" xmlns:a16="http://schemas.microsoft.com/office/drawing/2014/main" id="{E1EA775D-2936-4434-957C-20681AA1AC69}"/>
+                <a16:creationId xmlns:a16="http://schemas.microsoft.com/office/drawing/2014/main" xmlns="" id="{E1EA775D-2936-4434-957C-20681AA1AC69}"/>
               </a:ext>
             </a:extLst>
           </p:cNvPr>
@@ -10114,7 +10584,7 @@
           <p:cNvPr id="3" name="concept">
             <a:extLst>
               <a:ext uri="{FF2B5EF4-FFF2-40B4-BE49-F238E27FC236}">
-                <a16:creationId xmlns="" xmlns:a16="http://schemas.microsoft.com/office/drawing/2014/main" id="{016BA184-E45F-479D-B1D5-CC1C1B652877}"/>
+                <a16:creationId xmlns:a16="http://schemas.microsoft.com/office/drawing/2014/main" xmlns="" id="{016BA184-E45F-479D-B1D5-CC1C1B652877}"/>
               </a:ext>
             </a:extLst>
           </p:cNvPr>
@@ -10271,11 +10741,7 @@
           <a:p>
             <a:r>
               <a:rPr lang="pt-BR" sz="2400" dirty="0" smtClean="0"/>
-              <a:t>É </a:t>
-            </a:r>
-            <a:r>
-              <a:rPr lang="pt-BR" sz="2400" dirty="0" smtClean="0"/>
-              <a:t>uma </a:t>
+              <a:t>É uma </a:t>
             </a:r>
             <a:r>
               <a:rPr lang="pt-BR" sz="2400" b="1" dirty="0" smtClean="0"/>
@@ -10285,16 +10751,11 @@
               <a:rPr lang="pt-BR" sz="2400" dirty="0" smtClean="0"/>
               <a:t>: identifica o significado e a organização dos conteúdos. </a:t>
             </a:r>
-            <a:endParaRPr lang="pt-BR" sz="2400" dirty="0" smtClean="0"/>
           </a:p>
           <a:p>
             <a:r>
               <a:rPr lang="pt-BR" sz="2400" dirty="0" smtClean="0"/>
-              <a:t>Não </a:t>
-            </a:r>
-            <a:r>
-              <a:rPr lang="pt-BR" sz="2400" dirty="0" smtClean="0"/>
-              <a:t>é classificada como linguagem de programação.</a:t>
+              <a:t>Não é classificada como linguagem de programação.</a:t>
             </a:r>
             <a:endParaRPr lang="pt-BR" sz="2400" dirty="0"/>
           </a:p>
@@ -10499,18 +10960,7 @@
                 <a:ea typeface="DejaVu Sans"/>
                 <a:cs typeface="DejaVu Sans"/>
               </a:rPr>
-              <a:t> </a:t>
-            </a:r>
-            <a:r>
-              <a:rPr lang="pt-BR" sz="2800" b="1" dirty="0" smtClean="0">
-                <a:solidFill>
-                  <a:srgbClr val="FFAC83"/>
-                </a:solidFill>
-                <a:latin typeface="DejaVu Sans"/>
-                <a:ea typeface="DejaVu Sans"/>
-                <a:cs typeface="DejaVu Sans"/>
-              </a:rPr>
-              <a:t> &lt;/</a:t>
+              <a:t>  &lt;/</a:t>
             </a:r>
             <a:r>
               <a:rPr lang="pt-BR" sz="2800" b="1" dirty="0" err="1" smtClean="0">
@@ -10555,18 +11005,7 @@
                 <a:ea typeface="DejaVu Sans"/>
                 <a:cs typeface="DejaVu Sans"/>
               </a:rPr>
-              <a:t> </a:t>
-            </a:r>
-            <a:r>
-              <a:rPr lang="pt-BR" sz="2800" b="1" dirty="0" smtClean="0">
-                <a:solidFill>
-                  <a:srgbClr val="FFAC83"/>
-                </a:solidFill>
-                <a:latin typeface="DejaVu Sans"/>
-                <a:ea typeface="DejaVu Sans"/>
-                <a:cs typeface="DejaVu Sans"/>
-              </a:rPr>
-              <a:t> &lt;</a:t>
+              <a:t>  &lt;</a:t>
             </a:r>
             <a:r>
               <a:rPr lang="pt-BR" sz="2800" b="1" dirty="0" err="1" smtClean="0">
@@ -10611,18 +11050,7 @@
                 <a:ea typeface="DejaVu Sans"/>
                 <a:cs typeface="DejaVu Sans"/>
               </a:rPr>
-              <a:t> </a:t>
-            </a:r>
-            <a:r>
-              <a:rPr lang="pt-BR" sz="2800" b="1" dirty="0" smtClean="0">
-                <a:solidFill>
-                  <a:srgbClr val="FFAC83"/>
-                </a:solidFill>
-                <a:latin typeface="DejaVu Sans"/>
-                <a:ea typeface="DejaVu Sans"/>
-                <a:cs typeface="DejaVu Sans"/>
-              </a:rPr>
-              <a:t> &lt;/</a:t>
+              <a:t>  &lt;/</a:t>
             </a:r>
             <a:r>
               <a:rPr lang="pt-BR" sz="2800" b="1" dirty="0" err="1" smtClean="0">
@@ -10705,7 +11133,7 @@
     </p:spTree>
     <p:extLst>
       <p:ext uri="{BB962C8B-B14F-4D97-AF65-F5344CB8AC3E}">
-        <p14:creationId xmlns="" xmlns:p14="http://schemas.microsoft.com/office/powerpoint/2010/main" val="386543075"/>
+        <p14:creationId xmlns:p14="http://schemas.microsoft.com/office/powerpoint/2010/main" xmlns="" val="386543075"/>
       </p:ext>
     </p:extLst>
   </p:cSld>
@@ -10752,7 +11180,7 @@
           <p:cNvPr id="7" name="heading">
             <a:extLst>
               <a:ext uri="{FF2B5EF4-FFF2-40B4-BE49-F238E27FC236}">
-                <a16:creationId xmlns="" xmlns:a16="http://schemas.microsoft.com/office/drawing/2014/main" id="{0510DE6F-B322-4CCD-9E0D-5CE7329EBC19}"/>
+                <a16:creationId xmlns:a16="http://schemas.microsoft.com/office/drawing/2014/main" xmlns="" id="{0510DE6F-B322-4CCD-9E0D-5CE7329EBC19}"/>
               </a:ext>
             </a:extLst>
           </p:cNvPr>
@@ -10911,7 +11339,7 @@
           <p:cNvPr id="2" name="page">
             <a:extLst>
               <a:ext uri="{FF2B5EF4-FFF2-40B4-BE49-F238E27FC236}">
-                <a16:creationId xmlns="" xmlns:a16="http://schemas.microsoft.com/office/drawing/2014/main" id="{9A521A71-31D8-4BF1-8E74-D9113C331A70}"/>
+                <a16:creationId xmlns:a16="http://schemas.microsoft.com/office/drawing/2014/main" xmlns="" id="{9A521A71-31D8-4BF1-8E74-D9113C331A70}"/>
               </a:ext>
             </a:extLst>
           </p:cNvPr>
@@ -11101,7 +11529,7 @@
     </p:spTree>
     <p:extLst>
       <p:ext uri="{BB962C8B-B14F-4D97-AF65-F5344CB8AC3E}">
-        <p14:creationId xmlns="" xmlns:p14="http://schemas.microsoft.com/office/powerpoint/2010/main" val="1589244983"/>
+        <p14:creationId xmlns:p14="http://schemas.microsoft.com/office/powerpoint/2010/main" xmlns="" val="1589244983"/>
       </p:ext>
     </p:extLst>
   </p:cSld>
@@ -11148,7 +11576,7 @@
           <p:cNvPr id="8" name="heading">
             <a:extLst>
               <a:ext uri="{FF2B5EF4-FFF2-40B4-BE49-F238E27FC236}">
-                <a16:creationId xmlns="" xmlns:a16="http://schemas.microsoft.com/office/drawing/2014/main" id="{CF77DDA4-7366-406E-9972-2A729A60C6B8}"/>
+                <a16:creationId xmlns:a16="http://schemas.microsoft.com/office/drawing/2014/main" xmlns="" id="{CF77DDA4-7366-406E-9972-2A729A60C6B8}"/>
               </a:ext>
             </a:extLst>
           </p:cNvPr>
@@ -11340,7 +11768,7 @@
           <p:cNvPr id="2" name="page">
             <a:extLst>
               <a:ext uri="{FF2B5EF4-FFF2-40B4-BE49-F238E27FC236}">
-                <a16:creationId xmlns="" xmlns:a16="http://schemas.microsoft.com/office/drawing/2014/main" id="{74CEFADF-FECB-40EA-87D8-0B1B66163965}"/>
+                <a16:creationId xmlns:a16="http://schemas.microsoft.com/office/drawing/2014/main" xmlns="" id="{74CEFADF-FECB-40EA-87D8-0B1B66163965}"/>
               </a:ext>
             </a:extLst>
           </p:cNvPr>
@@ -11499,7 +11927,7 @@
           <p:cNvPr id="3" name="concept">
             <a:extLst>
               <a:ext uri="{FF2B5EF4-FFF2-40B4-BE49-F238E27FC236}">
-                <a16:creationId xmlns="" xmlns:a16="http://schemas.microsoft.com/office/drawing/2014/main" id="{E809737B-7683-4415-99E3-0D49E3C99403}"/>
+                <a16:creationId xmlns:a16="http://schemas.microsoft.com/office/drawing/2014/main" xmlns="" id="{E809737B-7683-4415-99E3-0D49E3C99403}"/>
               </a:ext>
             </a:extLst>
           </p:cNvPr>
@@ -11663,16 +12091,11 @@
               <a:rPr lang="pt-BR" dirty="0" smtClean="0"/>
               <a:t>O HTML identifica os elementos do documento; o CSS seleciona esses </a:t>
             </a:r>
-            <a:endParaRPr lang="pt-BR" dirty="0" smtClean="0"/>
           </a:p>
           <a:p>
             <a:r>
               <a:rPr lang="pt-BR" dirty="0" smtClean="0"/>
-              <a:t>elementos </a:t>
-            </a:r>
-            <a:r>
-              <a:rPr lang="pt-BR" dirty="0" smtClean="0"/>
-              <a:t>e aplica regras de apresentação.</a:t>
+              <a:t>elementos e aplica regras de apresentação.</a:t>
             </a:r>
             <a:endParaRPr lang="pt-BR" dirty="0"/>
           </a:p>
@@ -11683,7 +12106,7 @@
           <p:cNvPr id="4" name="code">
             <a:extLst>
               <a:ext uri="{FF2B5EF4-FFF2-40B4-BE49-F238E27FC236}">
-                <a16:creationId xmlns="" xmlns:a16="http://schemas.microsoft.com/office/drawing/2014/main" id="{1D11F5D3-461A-4D83-926E-7477804F2490}"/>
+                <a16:creationId xmlns:a16="http://schemas.microsoft.com/office/drawing/2014/main" xmlns="" id="{1D11F5D3-461A-4D83-926E-7477804F2490}"/>
               </a:ext>
             </a:extLst>
           </p:cNvPr>
@@ -11911,7 +12334,7 @@
           <p:cNvPr id="6" name="link-label">
             <a:extLst>
               <a:ext uri="{FF2B5EF4-FFF2-40B4-BE49-F238E27FC236}">
-                <a16:creationId xmlns="" xmlns:a16="http://schemas.microsoft.com/office/drawing/2014/main" id="{D26EA638-F6A3-452B-A3D2-2927956DFA20}"/>
+                <a16:creationId xmlns:a16="http://schemas.microsoft.com/office/drawing/2014/main" xmlns="" id="{D26EA638-F6A3-452B-A3D2-2927956DFA20}"/>
               </a:ext>
             </a:extLst>
           </p:cNvPr>
@@ -12070,7 +12493,7 @@
           <p:cNvPr id="7" name="code">
             <a:extLst>
               <a:ext uri="{FF2B5EF4-FFF2-40B4-BE49-F238E27FC236}">
-                <a16:creationId xmlns="" xmlns:a16="http://schemas.microsoft.com/office/drawing/2014/main" id="{41EF6802-6A71-40E9-A204-ACA8886C642F}"/>
+                <a16:creationId xmlns:a16="http://schemas.microsoft.com/office/drawing/2014/main" xmlns="" id="{41EF6802-6A71-40E9-A204-ACA8886C642F}"/>
               </a:ext>
             </a:extLst>
           </p:cNvPr>
@@ -12295,7 +12718,7 @@
     </p:spTree>
     <p:extLst>
       <p:ext uri="{BB962C8B-B14F-4D97-AF65-F5344CB8AC3E}">
-        <p14:creationId xmlns="" xmlns:p14="http://schemas.microsoft.com/office/powerpoint/2010/main" val="1754842131"/>
+        <p14:creationId xmlns:p14="http://schemas.microsoft.com/office/powerpoint/2010/main" xmlns="" val="1754842131"/>
       </p:ext>
     </p:extLst>
   </p:cSld>
@@ -12342,7 +12765,7 @@
           <p:cNvPr id="8" name="heading">
             <a:extLst>
               <a:ext uri="{FF2B5EF4-FFF2-40B4-BE49-F238E27FC236}">
-                <a16:creationId xmlns="" xmlns:a16="http://schemas.microsoft.com/office/drawing/2014/main" id="{CF77DDA4-7366-406E-9972-2A729A60C6B8}"/>
+                <a16:creationId xmlns:a16="http://schemas.microsoft.com/office/drawing/2014/main" xmlns="" id="{CF77DDA4-7366-406E-9972-2A729A60C6B8}"/>
               </a:ext>
             </a:extLst>
           </p:cNvPr>
@@ -12534,7 +12957,7 @@
           <p:cNvPr id="2" name="page">
             <a:extLst>
               <a:ext uri="{FF2B5EF4-FFF2-40B4-BE49-F238E27FC236}">
-                <a16:creationId xmlns="" xmlns:a16="http://schemas.microsoft.com/office/drawing/2014/main" id="{74CEFADF-FECB-40EA-87D8-0B1B66163965}"/>
+                <a16:creationId xmlns:a16="http://schemas.microsoft.com/office/drawing/2014/main" xmlns="" id="{74CEFADF-FECB-40EA-87D8-0B1B66163965}"/>
               </a:ext>
             </a:extLst>
           </p:cNvPr>
@@ -12724,7 +13147,7 @@
     </p:spTree>
     <p:extLst>
       <p:ext uri="{BB962C8B-B14F-4D97-AF65-F5344CB8AC3E}">
-        <p14:creationId xmlns="" xmlns:p14="http://schemas.microsoft.com/office/powerpoint/2010/main" val="1754842131"/>
+        <p14:creationId xmlns:p14="http://schemas.microsoft.com/office/powerpoint/2010/main" xmlns="" val="1754842131"/>
       </p:ext>
     </p:extLst>
   </p:cSld>
@@ -12771,7 +13194,7 @@
           <p:cNvPr id="11" name="heading">
             <a:extLst>
               <a:ext uri="{FF2B5EF4-FFF2-40B4-BE49-F238E27FC236}">
-                <a16:creationId xmlns="" xmlns:a16="http://schemas.microsoft.com/office/drawing/2014/main" id="{FA7B6F1D-9293-4D6D-959F-1DA43A05D3AD}"/>
+                <a16:creationId xmlns:a16="http://schemas.microsoft.com/office/drawing/2014/main" xmlns="" id="{FA7B6F1D-9293-4D6D-959F-1DA43A05D3AD}"/>
               </a:ext>
             </a:extLst>
           </p:cNvPr>
@@ -12917,15 +13340,7 @@
                   <a:srgbClr val="FFE08A"/>
                 </a:solidFill>
               </a:rPr>
-              <a:t>JavaScript</a:t>
-            </a:r>
-            <a:r>
-              <a:rPr sz="3600">
-                <a:solidFill>
-                  <a:srgbClr val="FFE08A"/>
-                </a:solidFill>
-              </a:rPr>
-              <a:t>: </a:t>
+              <a:t>JavaScript: </a:t>
             </a:r>
             <a:r>
               <a:rPr lang="pt-BR" sz="3600" dirty="0" smtClean="0">
@@ -12959,7 +13374,7 @@
           <p:cNvPr id="2" name="page">
             <a:extLst>
               <a:ext uri="{FF2B5EF4-FFF2-40B4-BE49-F238E27FC236}">
-                <a16:creationId xmlns="" xmlns:a16="http://schemas.microsoft.com/office/drawing/2014/main" id="{038CD327-0909-44DE-9B08-E2E6AA6232FC}"/>
+                <a16:creationId xmlns:a16="http://schemas.microsoft.com/office/drawing/2014/main" xmlns="" id="{038CD327-0909-44DE-9B08-E2E6AA6232FC}"/>
               </a:ext>
             </a:extLst>
           </p:cNvPr>
@@ -13118,7 +13533,7 @@
           <p:cNvPr id="3" name="concept">
             <a:extLst>
               <a:ext uri="{FF2B5EF4-FFF2-40B4-BE49-F238E27FC236}">
-                <a16:creationId xmlns="" xmlns:a16="http://schemas.microsoft.com/office/drawing/2014/main" id="{27DB647A-8D86-428F-81CE-FBE415631D69}"/>
+                <a16:creationId xmlns:a16="http://schemas.microsoft.com/office/drawing/2014/main" xmlns="" id="{27DB647A-8D86-428F-81CE-FBE415631D69}"/>
               </a:ext>
             </a:extLst>
           </p:cNvPr>
@@ -13264,13 +13679,8 @@
             </a:r>
             <a:r>
               <a:rPr lang="pt-BR" b="1" dirty="0" smtClean="0"/>
-              <a:t> </a:t>
-            </a:r>
-            <a:r>
-              <a:rPr lang="pt-BR" b="1" dirty="0" smtClean="0"/>
-              <a:t>é uma linguagem de programação utilizada para implementar </a:t>
-            </a:r>
-            <a:endParaRPr lang="pt-BR" b="1" dirty="0" smtClean="0"/>
+              <a:t> é uma linguagem de programação utilizada para implementar </a:t>
+            </a:r>
           </a:p>
           <a:p>
             <a:pPr>
@@ -13285,11 +13695,7 @@
             </a:pPr>
             <a:r>
               <a:rPr lang="pt-BR" b="1" dirty="0" smtClean="0"/>
-              <a:t>lógica</a:t>
-            </a:r>
-            <a:r>
-              <a:rPr lang="pt-BR" b="1" dirty="0" smtClean="0"/>
-              <a:t>, comportamentos e interações em páginas e aplicações</a:t>
+              <a:t>lógica, comportamentos e interações em páginas e aplicações</a:t>
             </a:r>
             <a:r>
               <a:rPr lang="pt-BR" dirty="0" smtClean="0"/>
@@ -13362,11 +13768,7 @@
             </a:pPr>
             <a:r>
               <a:rPr lang="pt-BR" dirty="0" smtClean="0"/>
-              <a:t> </a:t>
-            </a:r>
-            <a:r>
-              <a:rPr lang="pt-BR" dirty="0" smtClean="0"/>
-              <a:t>permite que a página responda às ações do usuário.”</a:t>
+              <a:t> permite que a página responda às ações do usuário.”</a:t>
             </a:r>
             <a:endParaRPr sz="2550" b="0">
               <a:solidFill>
@@ -13384,7 +13786,7 @@
           <p:cNvPr id="4" name="event">
             <a:extLst>
               <a:ext uri="{FF2B5EF4-FFF2-40B4-BE49-F238E27FC236}">
-                <a16:creationId xmlns="" xmlns:a16="http://schemas.microsoft.com/office/drawing/2014/main" id="{C64E534F-E09E-44C8-A798-BAAD746C7763}"/>
+                <a16:creationId xmlns:a16="http://schemas.microsoft.com/office/drawing/2014/main" xmlns="" id="{C64E534F-E09E-44C8-A798-BAAD746C7763}"/>
               </a:ext>
             </a:extLst>
           </p:cNvPr>
@@ -13543,7 +13945,7 @@
           <p:cNvPr id="5" name="event-body">
             <a:extLst>
               <a:ext uri="{FF2B5EF4-FFF2-40B4-BE49-F238E27FC236}">
-                <a16:creationId xmlns="" xmlns:a16="http://schemas.microsoft.com/office/drawing/2014/main" id="{FE3C8607-56DD-48DB-AB88-507521B1AD5A}"/>
+                <a16:creationId xmlns:a16="http://schemas.microsoft.com/office/drawing/2014/main" xmlns="" id="{FE3C8607-56DD-48DB-AB88-507521B1AD5A}"/>
               </a:ext>
             </a:extLst>
           </p:cNvPr>
@@ -13702,7 +14104,7 @@
           <p:cNvPr id="6" name="action">
             <a:extLst>
               <a:ext uri="{FF2B5EF4-FFF2-40B4-BE49-F238E27FC236}">
-                <a16:creationId xmlns="" xmlns:a16="http://schemas.microsoft.com/office/drawing/2014/main" id="{39D799E5-E23A-4F23-9ABB-32BB9D7DD433}"/>
+                <a16:creationId xmlns:a16="http://schemas.microsoft.com/office/drawing/2014/main" xmlns="" id="{39D799E5-E23A-4F23-9ABB-32BB9D7DD433}"/>
               </a:ext>
             </a:extLst>
           </p:cNvPr>
@@ -13861,7 +14263,7 @@
           <p:cNvPr id="7" name="action-body">
             <a:extLst>
               <a:ext uri="{FF2B5EF4-FFF2-40B4-BE49-F238E27FC236}">
-                <a16:creationId xmlns="" xmlns:a16="http://schemas.microsoft.com/office/drawing/2014/main" id="{85542F52-A408-496B-9F8A-879846EA8E39}"/>
+                <a16:creationId xmlns:a16="http://schemas.microsoft.com/office/drawing/2014/main" xmlns="" id="{85542F52-A408-496B-9F8A-879846EA8E39}"/>
               </a:ext>
             </a:extLst>
           </p:cNvPr>
@@ -14020,7 +14422,7 @@
           <p:cNvPr id="8" name="result">
             <a:extLst>
               <a:ext uri="{FF2B5EF4-FFF2-40B4-BE49-F238E27FC236}">
-                <a16:creationId xmlns="" xmlns:a16="http://schemas.microsoft.com/office/drawing/2014/main" id="{2980C8B9-9ACB-4CFD-97F7-F34DD8713C7B}"/>
+                <a16:creationId xmlns:a16="http://schemas.microsoft.com/office/drawing/2014/main" xmlns="" id="{2980C8B9-9ACB-4CFD-97F7-F34DD8713C7B}"/>
               </a:ext>
             </a:extLst>
           </p:cNvPr>
@@ -14179,7 +14581,7 @@
           <p:cNvPr id="9" name="result-body">
             <a:extLst>
               <a:ext uri="{FF2B5EF4-FFF2-40B4-BE49-F238E27FC236}">
-                <a16:creationId xmlns="" xmlns:a16="http://schemas.microsoft.com/office/drawing/2014/main" id="{14DEFF85-EA7B-4F59-88C0-DD7754BB934E}"/>
+                <a16:creationId xmlns:a16="http://schemas.microsoft.com/office/drawing/2014/main" xmlns="" id="{14DEFF85-EA7B-4F59-88C0-DD7754BB934E}"/>
               </a:ext>
             </a:extLst>
           </p:cNvPr>
@@ -14360,7 +14762,7 @@
     </p:spTree>
     <p:extLst>
       <p:ext uri="{BB962C8B-B14F-4D97-AF65-F5344CB8AC3E}">
-        <p14:creationId xmlns="" xmlns:p14="http://schemas.microsoft.com/office/powerpoint/2010/main" val="245313657"/>
+        <p14:creationId xmlns:p14="http://schemas.microsoft.com/office/powerpoint/2010/main" xmlns="" val="245313657"/>
       </p:ext>
     </p:extLst>
   </p:cSld>
@@ -14407,7 +14809,7 @@
           <p:cNvPr id="7" name="heading">
             <a:extLst>
               <a:ext uri="{FF2B5EF4-FFF2-40B4-BE49-F238E27FC236}">
-                <a16:creationId xmlns="" xmlns:a16="http://schemas.microsoft.com/office/drawing/2014/main" id="{FF58D89B-D69D-4955-9AEF-E78B2B177FB9}"/>
+                <a16:creationId xmlns:a16="http://schemas.microsoft.com/office/drawing/2014/main" xmlns="" id="{FF58D89B-D69D-4955-9AEF-E78B2B177FB9}"/>
               </a:ext>
             </a:extLst>
           </p:cNvPr>
@@ -14574,7 +14976,7 @@
           <p:cNvPr id="2" name="page">
             <a:extLst>
               <a:ext uri="{FF2B5EF4-FFF2-40B4-BE49-F238E27FC236}">
-                <a16:creationId xmlns="" xmlns:a16="http://schemas.microsoft.com/office/drawing/2014/main" id="{F9498CB5-9D80-46A3-9616-5BEDF146CA79}"/>
+                <a16:creationId xmlns:a16="http://schemas.microsoft.com/office/drawing/2014/main" xmlns="" id="{F9498CB5-9D80-46A3-9616-5BEDF146CA79}"/>
               </a:ext>
             </a:extLst>
           </p:cNvPr>
@@ -14733,7 +15135,7 @@
           <p:cNvPr id="5" name="answer-label">
             <a:extLst>
               <a:ext uri="{FF2B5EF4-FFF2-40B4-BE49-F238E27FC236}">
-                <a16:creationId xmlns="" xmlns:a16="http://schemas.microsoft.com/office/drawing/2014/main" id="{096E7C03-6DE2-4BB0-BB2A-9002DD6CBE5A}"/>
+                <a16:creationId xmlns:a16="http://schemas.microsoft.com/office/drawing/2014/main" xmlns="" id="{096E7C03-6DE2-4BB0-BB2A-9002DD6CBE5A}"/>
               </a:ext>
             </a:extLst>
           </p:cNvPr>
@@ -14892,7 +15294,7 @@
           <p:cNvPr id="6" name="answer">
             <a:extLst>
               <a:ext uri="{FF2B5EF4-FFF2-40B4-BE49-F238E27FC236}">
-                <a16:creationId xmlns="" xmlns:a16="http://schemas.microsoft.com/office/drawing/2014/main" id="{8235E4FC-4E10-4BF8-8494-B9038830B041}"/>
+                <a16:creationId xmlns:a16="http://schemas.microsoft.com/office/drawing/2014/main" xmlns="" id="{8235E4FC-4E10-4BF8-8494-B9038830B041}"/>
               </a:ext>
             </a:extLst>
           </p:cNvPr>
@@ -15082,7 +15484,7 @@
     </p:spTree>
     <p:extLst>
       <p:ext uri="{BB962C8B-B14F-4D97-AF65-F5344CB8AC3E}">
-        <p14:creationId xmlns="" xmlns:p14="http://schemas.microsoft.com/office/powerpoint/2010/main" val="213061041"/>
+        <p14:creationId xmlns:p14="http://schemas.microsoft.com/office/powerpoint/2010/main" xmlns="" val="213061041"/>
       </p:ext>
     </p:extLst>
   </p:cSld>
